--- a/workshops/session4-llm-parameters.pptx
+++ b/workshops/session4-llm-parameters.pptx
@@ -507,7 +507,8 @@
           <a:p>
             <a:r>
               <a:rPr lang="en-US" dirty="0"/>
-              <a:t/>
+              <a:t>پشت صحنهٔ LLM: پارامترها چه‌اند و چرا مهم‌اند.
+سؤال شروع: «ChatGPT چطور این همه چیز یاد گرفته؟»</a:t>
             </a:r>
             <a:endParaRPr lang="en-US" dirty="0"/>
           </a:p>
@@ -595,7 +596,7 @@
           <a:p>
             <a:r>
               <a:rPr lang="en-US" dirty="0"/>
-              <a:t/>
+              <a:t>مرور: LLM = مدل زبانی بزرگ، حدس کلمهٔ بعد.</a:t>
             </a:r>
             <a:endParaRPr lang="en-US" dirty="0"/>
           </a:p>
@@ -683,7 +684,10 @@
           <a:p>
             <a:r>
               <a:rPr lang="en-US" dirty="0"/>
-              <a:t/>
+              <a:t>مثال کارشده (حساب ملموس بزرگی):
+مدل جلسهٔ ۸ فقط ۲ پارامتر دارد (شیب و بایاس).
+حالا GPT-3 با حدود ۱۷۵ میلیارد پارامتر: اگر چرخاندن هر ولوم فقط ۱ ثانیه طول بکشد، تنظیم همهٔ آن‌ها حدود ۵٬۵۰۰ سال طول می‌کشد!
+نتیجه: آموزش مدل‌های بزرگ فقط با کامپیوتر ممکن است.</a:t>
             </a:r>
             <a:endParaRPr lang="en-US" dirty="0"/>
           </a:p>
@@ -771,7 +775,8 @@
           <a:p>
             <a:r>
               <a:rPr lang="en-US" dirty="0"/>
-              <a:t/>
+              <a:t>این جدول را با عدد واقعی توضیح دهید.
+پل به جلسهٔ ۸: مدل قیمت خانهٔ ما فقط ۲ پارامتر دارد.</a:t>
             </a:r>
             <a:endParaRPr lang="en-US" dirty="0"/>
           </a:p>
@@ -859,7 +864,8 @@
           <a:p>
             <a:r>
               <a:rPr lang="en-US" dirty="0"/>
-              <a:t/>
+              <a:t>نکته: بزرگ‌تر بودن همیشه بهتر نیست.
+مثال: مدلی با ۱۰۰ میلیارد پارامتر ولی دادهٔ بد، از مدلی با ۱ میلیارد پارامتر و دادهٔ خوب بدتر است.</a:t>
             </a:r>
             <a:endParaRPr lang="en-US" dirty="0"/>
           </a:p>
@@ -947,7 +953,8 @@
           <a:p>
             <a:r>
               <a:rPr lang="en-US" dirty="0"/>
-              <a:t/>
+              <a:t>سؤال: «اگر مدل ما فقط ۲ پارامتر دارد، چطور می‌تواند قیمت خانه را پیش‌بینی کند؟»
+جواب: چون رابطهٔ ساده‌ای بین متراژ و قیمت وجود دارد.</a:t>
             </a:r>
             <a:endParaRPr lang="en-US" dirty="0"/>
           </a:p>
@@ -1698,7 +1705,7 @@
       </p:sp>
       <p:sp>
         <p:nvSpPr>
-          <p:cNvPr id="5" name="Text 3"/>
+          <p:cNvPr id="6" name="Text 3"/>
           <p:cNvSpPr/>
           <p:nvPr/>
         </p:nvSpPr>
@@ -1737,7 +1744,7 @@
       </p:sp>
       <p:sp>
         <p:nvSpPr>
-          <p:cNvPr id="6" name="Text 4"/>
+          <p:cNvPr id="7" name="Text 4"/>
           <p:cNvSpPr/>
           <p:nvPr/>
         </p:nvSpPr>
@@ -1955,7 +1962,7 @@
       </p:sp>
       <p:sp>
         <p:nvSpPr>
-          <p:cNvPr id="5" name="Text 3"/>
+          <p:cNvPr id="6" name="Text 3"/>
           <p:cNvSpPr/>
           <p:nvPr/>
         </p:nvSpPr>
@@ -1994,7 +2001,7 @@
       </p:sp>
       <p:sp>
         <p:nvSpPr>
-          <p:cNvPr id="6" name="Text 4"/>
+          <p:cNvPr id="7" name="Text 4"/>
           <p:cNvSpPr/>
           <p:nvPr/>
         </p:nvSpPr>
@@ -2979,7 +2986,7 @@
       </p:graphicFrame>
       <p:sp>
         <p:nvSpPr>
-          <p:cNvPr id="5" name="Text 2"/>
+          <p:cNvPr id="6" name="Text 2"/>
           <p:cNvSpPr/>
           <p:nvPr/>
         </p:nvSpPr>
@@ -3018,7 +3025,7 @@
       </p:sp>
       <p:sp>
         <p:nvSpPr>
-          <p:cNvPr id="6" name="Text 3"/>
+          <p:cNvPr id="7" name="Text 3"/>
           <p:cNvSpPr/>
           <p:nvPr/>
         </p:nvSpPr>
@@ -3532,7 +3539,7 @@
       </p:sp>
       <p:sp>
         <p:nvSpPr>
-          <p:cNvPr id="16" name="Text 14"/>
+          <p:cNvPr id="17" name="Text 14"/>
           <p:cNvSpPr/>
           <p:nvPr/>
         </p:nvSpPr>
@@ -3571,7 +3578,7 @@
       </p:sp>
       <p:sp>
         <p:nvSpPr>
-          <p:cNvPr id="17" name="Text 15"/>
+          <p:cNvPr id="18" name="Text 15"/>
           <p:cNvSpPr/>
           <p:nvPr/>
         </p:nvSpPr>
@@ -3789,7 +3796,7 @@
       </p:sp>
       <p:sp>
         <p:nvSpPr>
-          <p:cNvPr id="5" name="Text 3"/>
+          <p:cNvPr id="6" name="Text 3"/>
           <p:cNvSpPr/>
           <p:nvPr/>
         </p:nvSpPr>
@@ -3828,7 +3835,7 @@
       </p:sp>
       <p:sp>
         <p:nvSpPr>
-          <p:cNvPr id="6" name="Text 4"/>
+          <p:cNvPr id="7" name="Text 4"/>
           <p:cNvSpPr/>
           <p:nvPr/>
         </p:nvSpPr>
